--- a/docs/templates/BNI_テンプレート_熱烈歓迎.pptx
+++ b/docs/templates/BNI_テンプレート_熱烈歓迎.pptx
@@ -752,10 +752,10 @@
     </a:clrScheme>
     <a:fontScheme name="Office">
       <a:majorFont>
-        <a:latin typeface="Calibri Light" panose="020F0302020204030204"/>
-        <a:ea typeface=""/>
+        <a:latin typeface="メイリオ"/>
+        <a:ea typeface="メイリオ"/>
         <a:cs typeface=""/>
-        <a:font script="Jpan" typeface="游ゴシック Light"/>
+        <a:font script="Jpan" typeface="メイリオ"/>
         <a:font script="Hang" typeface="맑은 고딕"/>
         <a:font script="Hans" typeface="等线 Light"/>
         <a:font script="Hant" typeface="新細明體"/>
@@ -804,10 +804,10 @@
         <a:font script="Tfng" typeface="Ebrima"/>
       </a:majorFont>
       <a:minorFont>
-        <a:latin typeface="Calibri" panose="020F0502020204030204"/>
-        <a:ea typeface=""/>
+        <a:latin typeface="メイリオ"/>
+        <a:ea typeface="メイリオ"/>
         <a:cs typeface=""/>
-        <a:font script="Jpan" typeface="游ゴシック"/>
+        <a:font script="Jpan" typeface="メイリオ"/>
         <a:font script="Hang" typeface="맑은 고딕"/>
         <a:font script="Hans" typeface="等线"/>
         <a:font script="Hant" typeface="新細明體"/>
